--- a/ClasesPPTX/W07A.pptx
+++ b/ClasesPPTX/W07A.pptx
@@ -12085,7 +12085,7 @@
           <a:p>
             <a:fld id="{02DE72FA-9408-41EA-A0D5-DB4639E7E8A7}" type="datetimeFigureOut">
               <a:rPr lang="es-CO" smtClean="0"/>
-              <a:t>27/01/2026</a:t>
+              <a:t>1/03/2026</a:t>
             </a:fld>
             <a:endParaRPr lang="es-CO"/>
           </a:p>
@@ -12785,7 +12785,7 @@
           <a:p>
             <a:fld id="{054F42C7-710D-4842-8651-A039020B55CB}" type="datetimeFigureOut">
               <a:rPr lang="es-CO" smtClean="0"/>
-              <a:t>27/01/2026</a:t>
+              <a:t>1/03/2026</a:t>
             </a:fld>
             <a:endParaRPr lang="es-CO"/>
           </a:p>
@@ -12985,7 +12985,7 @@
           <a:p>
             <a:fld id="{054F42C7-710D-4842-8651-A039020B55CB}" type="datetimeFigureOut">
               <a:rPr lang="es-CO" smtClean="0"/>
-              <a:t>27/01/2026</a:t>
+              <a:t>1/03/2026</a:t>
             </a:fld>
             <a:endParaRPr lang="es-CO"/>
           </a:p>
@@ -13195,7 +13195,7 @@
           <a:p>
             <a:fld id="{054F42C7-710D-4842-8651-A039020B55CB}" type="datetimeFigureOut">
               <a:rPr lang="es-CO" smtClean="0"/>
-              <a:t>27/01/2026</a:t>
+              <a:t>1/03/2026</a:t>
             </a:fld>
             <a:endParaRPr lang="es-CO"/>
           </a:p>
@@ -13395,7 +13395,7 @@
           <a:p>
             <a:fld id="{054F42C7-710D-4842-8651-A039020B55CB}" type="datetimeFigureOut">
               <a:rPr lang="es-CO" smtClean="0"/>
-              <a:t>27/01/2026</a:t>
+              <a:t>1/03/2026</a:t>
             </a:fld>
             <a:endParaRPr lang="es-CO"/>
           </a:p>
@@ -13671,7 +13671,7 @@
           <a:p>
             <a:fld id="{054F42C7-710D-4842-8651-A039020B55CB}" type="datetimeFigureOut">
               <a:rPr lang="es-CO" smtClean="0"/>
-              <a:t>27/01/2026</a:t>
+              <a:t>1/03/2026</a:t>
             </a:fld>
             <a:endParaRPr lang="es-CO"/>
           </a:p>
@@ -13939,7 +13939,7 @@
           <a:p>
             <a:fld id="{054F42C7-710D-4842-8651-A039020B55CB}" type="datetimeFigureOut">
               <a:rPr lang="es-CO" smtClean="0"/>
-              <a:t>27/01/2026</a:t>
+              <a:t>1/03/2026</a:t>
             </a:fld>
             <a:endParaRPr lang="es-CO"/>
           </a:p>
@@ -14354,7 +14354,7 @@
           <a:p>
             <a:fld id="{054F42C7-710D-4842-8651-A039020B55CB}" type="datetimeFigureOut">
               <a:rPr lang="es-CO" smtClean="0"/>
-              <a:t>27/01/2026</a:t>
+              <a:t>1/03/2026</a:t>
             </a:fld>
             <a:endParaRPr lang="es-CO"/>
           </a:p>
@@ -14496,7 +14496,7 @@
           <a:p>
             <a:fld id="{054F42C7-710D-4842-8651-A039020B55CB}" type="datetimeFigureOut">
               <a:rPr lang="es-CO" smtClean="0"/>
-              <a:t>27/01/2026</a:t>
+              <a:t>1/03/2026</a:t>
             </a:fld>
             <a:endParaRPr lang="es-CO"/>
           </a:p>
@@ -14609,7 +14609,7 @@
           <a:p>
             <a:fld id="{054F42C7-710D-4842-8651-A039020B55CB}" type="datetimeFigureOut">
               <a:rPr lang="es-CO" smtClean="0"/>
-              <a:t>27/01/2026</a:t>
+              <a:t>1/03/2026</a:t>
             </a:fld>
             <a:endParaRPr lang="es-CO"/>
           </a:p>
@@ -14922,7 +14922,7 @@
           <a:p>
             <a:fld id="{054F42C7-710D-4842-8651-A039020B55CB}" type="datetimeFigureOut">
               <a:rPr lang="es-CO" smtClean="0"/>
-              <a:t>27/01/2026</a:t>
+              <a:t>1/03/2026</a:t>
             </a:fld>
             <a:endParaRPr lang="es-CO"/>
           </a:p>
@@ -15211,7 +15211,7 @@
           <a:p>
             <a:fld id="{054F42C7-710D-4842-8651-A039020B55CB}" type="datetimeFigureOut">
               <a:rPr lang="es-CO" smtClean="0"/>
-              <a:t>27/01/2026</a:t>
+              <a:t>1/03/2026</a:t>
             </a:fld>
             <a:endParaRPr lang="es-CO"/>
           </a:p>
@@ -15454,7 +15454,7 @@
           <a:p>
             <a:fld id="{054F42C7-710D-4842-8651-A039020B55CB}" type="datetimeFigureOut">
               <a:rPr lang="es-CO" smtClean="0"/>
-              <a:t>27/01/2026</a:t>
+              <a:t>1/03/2026</a:t>
             </a:fld>
             <a:endParaRPr lang="es-CO"/>
           </a:p>
@@ -20193,10 +20193,22 @@
               <a:t>docs</a:t>
             </a:r>
             <a:r>
+              <a:rPr lang="es-CO">
+                <a:latin typeface="Consolas" panose="020B0609020204030204" pitchFamily="49" charset="0"/>
+              </a:rPr>
+              <a:t>/</a:t>
+            </a:r>
+            <a:r>
+              <a:rPr lang="es-CO" u="sng">
+                <a:latin typeface="Consolas" panose="020B0609020204030204" pitchFamily="49" charset="0"/>
+              </a:rPr>
+              <a:t>w07a</a:t>
+            </a:r>
+            <a:r>
               <a:rPr lang="es-CO" dirty="0">
                 <a:latin typeface="Consolas" panose="020B0609020204030204" pitchFamily="49" charset="0"/>
               </a:rPr>
-              <a:t>/w06a_run_log.md’ </a:t>
+              <a:t>_run_log.md’ </a:t>
             </a:r>
             <a:r>
               <a:rPr lang="es-CO" dirty="0"/>
